--- a/presentations/b12-security-operations/B12_Security_Operations_Narrated.pptx
+++ b/presentations/b12-security-operations/B12_Security_Operations_Narrated.pptx
@@ -187,7 +187,7 @@
     </p:spTree>
     <p:extLst>
       <p:ext uri="{BB962C8B-B14F-4D97-AF65-F5344CB8AC3E}">
-        <p14:creationId xmlns:p14="http://schemas.microsoft.com/office/powerpoint/2010/main" val="3364046776"/>
+        <p14:creationId xmlns:p14="http://schemas.microsoft.com/office/powerpoint/2010/main" val="3253904720"/>
       </p:ext>
     </p:extLst>
   </p:cSld>
@@ -2525,7 +2525,7 @@
             <a:hlinkClick r:id="" action="ppaction://media"/>
             <a:extLst>
               <a:ext uri="{FF2B5EF4-FFF2-40B4-BE49-F238E27FC236}">
-                <a16:creationId xmlns:a16="http://schemas.microsoft.com/office/drawing/2014/main" id="{D8FA2712-81BB-3DCE-DAED-60F96FF41C23}"/>
+                <a16:creationId xmlns:a16="http://schemas.microsoft.com/office/drawing/2014/main" id="{7FCEAED6-93B5-D7DE-69DA-5E8F0833F392}"/>
               </a:ext>
             </a:extLst>
           </p:cNvPr>
@@ -2541,7 +2541,7 @@
                     <p:ext uri="{3AFAAA56-56D3-431D-BCD4-E75A35582382}">
                       <p173:tracksInfo xmlns:p173="http://schemas.microsoft.com/office/powerpoint/2017/3/main" displayLoc="slide">
                         <p173:trackLst>
-                          <p173:track id="{705FF817-039D-4EA5-99B9-6793F14214D1}" label="English (captions)" lang="en-US" r:embed="rId6"/>
+                          <p173:track id="{0D12A927-6005-47DA-B400-EC1C7E21E3DF}" label="English (captions)" lang="en-US" r:embed="rId6"/>
                         </p173:trackLst>
                       </p173:tracksInfo>
                     </p:ext>
@@ -2559,7 +2559,7 @@
         </p:blipFill>
         <p:spPr>
           <a:xfrm>
-            <a:off x="127000" y="6350000"/>
+            <a:off x="12446000" y="127000"/>
             <a:ext cx="304800" cy="304800"/>
           </a:xfrm>
           <a:prstGeom prst="rect">
@@ -3947,7 +3947,7 @@
             <a:hlinkClick r:id="" action="ppaction://media"/>
             <a:extLst>
               <a:ext uri="{FF2B5EF4-FFF2-40B4-BE49-F238E27FC236}">
-                <a16:creationId xmlns:a16="http://schemas.microsoft.com/office/drawing/2014/main" id="{FA8025CC-20BF-BA09-CF84-80092FFD271A}"/>
+                <a16:creationId xmlns:a16="http://schemas.microsoft.com/office/drawing/2014/main" id="{95041AF8-6784-A76F-5CDD-595BAA70EF98}"/>
               </a:ext>
             </a:extLst>
           </p:cNvPr>
@@ -3963,7 +3963,7 @@
                     <p:ext uri="{3AFAAA56-56D3-431D-BCD4-E75A35582382}">
                       <p173:tracksInfo xmlns:p173="http://schemas.microsoft.com/office/powerpoint/2017/3/main" displayLoc="slide">
                         <p173:trackLst>
-                          <p173:track id="{FBC0D2FA-AEA0-4BAF-9A92-6AA515EA03E4}" label="English (captions)" lang="en-US" r:embed="rId9"/>
+                          <p173:track id="{CED99B52-566D-4053-89FD-B6B85AF41F2D}" label="English (captions)" lang="en-US" r:embed="rId9"/>
                         </p173:trackLst>
                       </p173:tracksInfo>
                     </p:ext>
@@ -3981,7 +3981,7 @@
         </p:blipFill>
         <p:spPr>
           <a:xfrm>
-            <a:off x="127000" y="6350000"/>
+            <a:off x="12446000" y="127000"/>
             <a:ext cx="304800" cy="304800"/>
           </a:xfrm>
           <a:prstGeom prst="rect">
@@ -5437,7 +5437,7 @@
             <a:hlinkClick r:id="" action="ppaction://media"/>
             <a:extLst>
               <a:ext uri="{FF2B5EF4-FFF2-40B4-BE49-F238E27FC236}">
-                <a16:creationId xmlns:a16="http://schemas.microsoft.com/office/drawing/2014/main" id="{423B3856-87E9-AFAD-9AA0-95241ADC595F}"/>
+                <a16:creationId xmlns:a16="http://schemas.microsoft.com/office/drawing/2014/main" id="{868816A5-F14D-4D27-0330-D10FD6A4147D}"/>
               </a:ext>
             </a:extLst>
           </p:cNvPr>
@@ -5453,7 +5453,7 @@
                     <p:ext uri="{3AFAAA56-56D3-431D-BCD4-E75A35582382}">
                       <p173:tracksInfo xmlns:p173="http://schemas.microsoft.com/office/powerpoint/2017/3/main" displayLoc="slide">
                         <p173:trackLst>
-                          <p173:track id="{91EE0293-1AFC-4441-A391-C40B3B6E3034}" label="English (captions)" lang="en-US" r:embed="rId9"/>
+                          <p173:track id="{A36EDA7F-64F4-476B-ABB0-3C9E2B8E2042}" label="English (captions)" lang="en-US" r:embed="rId9"/>
                         </p173:trackLst>
                       </p173:tracksInfo>
                     </p:ext>
@@ -5471,7 +5471,7 @@
         </p:blipFill>
         <p:spPr>
           <a:xfrm>
-            <a:off x="127000" y="6350000"/>
+            <a:off x="12446000" y="127000"/>
             <a:ext cx="304800" cy="304800"/>
           </a:xfrm>
           <a:prstGeom prst="rect">
@@ -7262,7 +7262,7 @@
             <a:hlinkClick r:id="" action="ppaction://media"/>
             <a:extLst>
               <a:ext uri="{FF2B5EF4-FFF2-40B4-BE49-F238E27FC236}">
-                <a16:creationId xmlns:a16="http://schemas.microsoft.com/office/drawing/2014/main" id="{70EBD5FF-1574-A941-389A-9B17A07FCFF3}"/>
+                <a16:creationId xmlns:a16="http://schemas.microsoft.com/office/drawing/2014/main" id="{1BDFC679-DB3D-1BAA-20A5-9CEA65970CC6}"/>
               </a:ext>
             </a:extLst>
           </p:cNvPr>
@@ -7278,7 +7278,7 @@
                     <p:ext uri="{3AFAAA56-56D3-431D-BCD4-E75A35582382}">
                       <p173:tracksInfo xmlns:p173="http://schemas.microsoft.com/office/powerpoint/2017/3/main" displayLoc="slide">
                         <p173:trackLst>
-                          <p173:track id="{41EA9AA4-5094-4642-92FE-7A63103216BC}" label="English (captions)" lang="en-US" r:embed="rId8"/>
+                          <p173:track id="{BCA99571-6F21-4EFA-9652-1439A77AB956}" label="English (captions)" lang="en-US" r:embed="rId8"/>
                         </p173:trackLst>
                       </p173:tracksInfo>
                     </p:ext>
@@ -7296,7 +7296,7 @@
         </p:blipFill>
         <p:spPr>
           <a:xfrm>
-            <a:off x="127000" y="6350000"/>
+            <a:off x="12446000" y="127000"/>
             <a:ext cx="304800" cy="304800"/>
           </a:xfrm>
           <a:prstGeom prst="rect">
@@ -8859,7 +8859,7 @@
             <a:hlinkClick r:id="" action="ppaction://media"/>
             <a:extLst>
               <a:ext uri="{FF2B5EF4-FFF2-40B4-BE49-F238E27FC236}">
-                <a16:creationId xmlns:a16="http://schemas.microsoft.com/office/drawing/2014/main" id="{F6C580C3-59E6-43B5-6799-1D5F9E0ABDD7}"/>
+                <a16:creationId xmlns:a16="http://schemas.microsoft.com/office/drawing/2014/main" id="{17BA0ACA-15D6-26E3-481E-82AB0880F573}"/>
               </a:ext>
             </a:extLst>
           </p:cNvPr>
@@ -8875,7 +8875,7 @@
                     <p:ext uri="{3AFAAA56-56D3-431D-BCD4-E75A35582382}">
                       <p173:tracksInfo xmlns:p173="http://schemas.microsoft.com/office/powerpoint/2017/3/main" displayLoc="slide">
                         <p173:trackLst>
-                          <p173:track id="{DBC49115-938A-4A9E-B386-C238BF18CBD6}" label="English (captions)" lang="en-US" r:embed="rId9"/>
+                          <p173:track id="{FC4BCC64-52BC-4954-AEBD-B08151C6A172}" label="English (captions)" lang="en-US" r:embed="rId9"/>
                         </p173:trackLst>
                       </p173:tracksInfo>
                     </p:ext>
@@ -8893,7 +8893,7 @@
         </p:blipFill>
         <p:spPr>
           <a:xfrm>
-            <a:off x="127000" y="6350000"/>
+            <a:off x="12446000" y="127000"/>
             <a:ext cx="304800" cy="304800"/>
           </a:xfrm>
           <a:prstGeom prst="rect">
@@ -9962,7 +9962,7 @@
             <a:hlinkClick r:id="" action="ppaction://media"/>
             <a:extLst>
               <a:ext uri="{FF2B5EF4-FFF2-40B4-BE49-F238E27FC236}">
-                <a16:creationId xmlns:a16="http://schemas.microsoft.com/office/drawing/2014/main" id="{E6DA8DE9-DC10-963E-331C-CFF993328F69}"/>
+                <a16:creationId xmlns:a16="http://schemas.microsoft.com/office/drawing/2014/main" id="{6A7B492C-858D-70A7-911C-DF7701D07001}"/>
               </a:ext>
             </a:extLst>
           </p:cNvPr>
@@ -9978,7 +9978,7 @@
                     <p:ext uri="{3AFAAA56-56D3-431D-BCD4-E75A35582382}">
                       <p173:tracksInfo xmlns:p173="http://schemas.microsoft.com/office/powerpoint/2017/3/main" displayLoc="slide">
                         <p173:trackLst>
-                          <p173:track id="{920856E6-3150-4C90-8B17-800C88AE60CA}" label="English (captions)" lang="en-US" r:embed="rId11"/>
+                          <p173:track id="{7410C4E6-7856-496B-B1B1-E55CD9CA49BA}" label="English (captions)" lang="en-US" r:embed="rId11"/>
                         </p173:trackLst>
                       </p173:tracksInfo>
                     </p:ext>
@@ -9996,7 +9996,7 @@
         </p:blipFill>
         <p:spPr>
           <a:xfrm>
-            <a:off x="127000" y="6350000"/>
+            <a:off x="12446000" y="127000"/>
             <a:ext cx="304800" cy="304800"/>
           </a:xfrm>
           <a:prstGeom prst="rect">
@@ -11069,7 +11069,7 @@
             <a:hlinkClick r:id="" action="ppaction://media"/>
             <a:extLst>
               <a:ext uri="{FF2B5EF4-FFF2-40B4-BE49-F238E27FC236}">
-                <a16:creationId xmlns:a16="http://schemas.microsoft.com/office/drawing/2014/main" id="{BBB2EE97-1D42-8F8A-B710-77C3080843B1}"/>
+                <a16:creationId xmlns:a16="http://schemas.microsoft.com/office/drawing/2014/main" id="{E2FF1382-8E76-B83C-9B7A-B33E94CC22A1}"/>
               </a:ext>
             </a:extLst>
           </p:cNvPr>
@@ -11085,7 +11085,7 @@
                     <p:ext uri="{3AFAAA56-56D3-431D-BCD4-E75A35582382}">
                       <p173:tracksInfo xmlns:p173="http://schemas.microsoft.com/office/powerpoint/2017/3/main" displayLoc="slide">
                         <p173:trackLst>
-                          <p173:track id="{3633A340-F990-4729-A73E-D2164F932CD4}" label="English (captions)" lang="en-US" r:embed="rId8"/>
+                          <p173:track id="{5CF9901F-6270-4527-B3C7-38B3572D7423}" label="English (captions)" lang="en-US" r:embed="rId8"/>
                         </p173:trackLst>
                       </p173:tracksInfo>
                     </p:ext>
@@ -11103,7 +11103,7 @@
         </p:blipFill>
         <p:spPr>
           <a:xfrm>
-            <a:off x="127000" y="6350000"/>
+            <a:off x="12446000" y="127000"/>
             <a:ext cx="304800" cy="304800"/>
           </a:xfrm>
           <a:prstGeom prst="rect">
@@ -12452,7 +12452,7 @@
             <a:hlinkClick r:id="" action="ppaction://media"/>
             <a:extLst>
               <a:ext uri="{FF2B5EF4-FFF2-40B4-BE49-F238E27FC236}">
-                <a16:creationId xmlns:a16="http://schemas.microsoft.com/office/drawing/2014/main" id="{19A50FDF-87D1-D852-01B4-70F496542130}"/>
+                <a16:creationId xmlns:a16="http://schemas.microsoft.com/office/drawing/2014/main" id="{1ACB2A9D-CCC8-B6B1-358A-D4769604DDD9}"/>
               </a:ext>
             </a:extLst>
           </p:cNvPr>
@@ -12468,7 +12468,7 @@
                     <p:ext uri="{3AFAAA56-56D3-431D-BCD4-E75A35582382}">
                       <p173:tracksInfo xmlns:p173="http://schemas.microsoft.com/office/powerpoint/2017/3/main" displayLoc="slide">
                         <p173:trackLst>
-                          <p173:track id="{12A92D05-27BE-4EB9-84B8-2307D5163BA3}" label="English (captions)" lang="en-US" r:embed="rId9"/>
+                          <p173:track id="{AA609E15-994A-4FFA-B1BD-BA72400E7B82}" label="English (captions)" lang="en-US" r:embed="rId9"/>
                         </p173:trackLst>
                       </p173:tracksInfo>
                     </p:ext>
@@ -12486,7 +12486,7 @@
         </p:blipFill>
         <p:spPr>
           <a:xfrm>
-            <a:off x="127000" y="6350000"/>
+            <a:off x="12446000" y="127000"/>
             <a:ext cx="304800" cy="304800"/>
           </a:xfrm>
           <a:prstGeom prst="rect">
@@ -14502,7 +14502,7 @@
             <a:hlinkClick r:id="" action="ppaction://media"/>
             <a:extLst>
               <a:ext uri="{FF2B5EF4-FFF2-40B4-BE49-F238E27FC236}">
-                <a16:creationId xmlns:a16="http://schemas.microsoft.com/office/drawing/2014/main" id="{112DBCFD-FED8-A588-AFCC-6BA945A821E6}"/>
+                <a16:creationId xmlns:a16="http://schemas.microsoft.com/office/drawing/2014/main" id="{92ABAC0F-8946-6695-11EB-EA5017DF0FBF}"/>
               </a:ext>
             </a:extLst>
           </p:cNvPr>
@@ -14518,7 +14518,7 @@
                     <p:ext uri="{3AFAAA56-56D3-431D-BCD4-E75A35582382}">
                       <p173:tracksInfo xmlns:p173="http://schemas.microsoft.com/office/powerpoint/2017/3/main" displayLoc="slide">
                         <p173:trackLst>
-                          <p173:track id="{11799799-8853-4D1F-B3A6-C974189196B6}" label="English (captions)" lang="en-US" r:embed="rId8"/>
+                          <p173:track id="{6BCBF812-AC4B-48CE-85C2-6D50CB2EF204}" label="English (captions)" lang="en-US" r:embed="rId8"/>
                         </p173:trackLst>
                       </p173:tracksInfo>
                     </p:ext>
@@ -14536,7 +14536,7 @@
         </p:blipFill>
         <p:spPr>
           <a:xfrm>
-            <a:off x="127000" y="6350000"/>
+            <a:off x="12446000" y="127000"/>
             <a:ext cx="304800" cy="304800"/>
           </a:xfrm>
           <a:prstGeom prst="rect">
@@ -16515,7 +16515,7 @@
             <a:hlinkClick r:id="" action="ppaction://media"/>
             <a:extLst>
               <a:ext uri="{FF2B5EF4-FFF2-40B4-BE49-F238E27FC236}">
-                <a16:creationId xmlns:a16="http://schemas.microsoft.com/office/drawing/2014/main" id="{7E010B73-807D-BF2A-44C7-EC5B8B53BFBE}"/>
+                <a16:creationId xmlns:a16="http://schemas.microsoft.com/office/drawing/2014/main" id="{4C811A37-65A0-09DD-25A9-7B6BFDB2141A}"/>
               </a:ext>
             </a:extLst>
           </p:cNvPr>
@@ -16531,7 +16531,7 @@
                     <p:ext uri="{3AFAAA56-56D3-431D-BCD4-E75A35582382}">
                       <p173:tracksInfo xmlns:p173="http://schemas.microsoft.com/office/powerpoint/2017/3/main" displayLoc="slide">
                         <p173:trackLst>
-                          <p173:track id="{BCEFC546-8936-4A6B-9FA6-02BB5177E547}" label="English (captions)" lang="en-US" r:embed="rId7"/>
+                          <p173:track id="{AA0D9A1A-8E9D-4714-8B70-BDD543B004FB}" label="English (captions)" lang="en-US" r:embed="rId7"/>
                         </p173:trackLst>
                       </p173:tracksInfo>
                     </p:ext>
@@ -16549,7 +16549,7 @@
         </p:blipFill>
         <p:spPr>
           <a:xfrm>
-            <a:off x="127000" y="6350000"/>
+            <a:off x="12446000" y="127000"/>
             <a:ext cx="304800" cy="304800"/>
           </a:xfrm>
           <a:prstGeom prst="rect">
@@ -17622,7 +17622,7 @@
             <a:hlinkClick r:id="" action="ppaction://media"/>
             <a:extLst>
               <a:ext uri="{FF2B5EF4-FFF2-40B4-BE49-F238E27FC236}">
-                <a16:creationId xmlns:a16="http://schemas.microsoft.com/office/drawing/2014/main" id="{07C138DE-823E-2442-CFFE-BB5680F55266}"/>
+                <a16:creationId xmlns:a16="http://schemas.microsoft.com/office/drawing/2014/main" id="{4C452772-1F39-310C-A55F-F91496C2B616}"/>
               </a:ext>
             </a:extLst>
           </p:cNvPr>
@@ -17638,7 +17638,7 @@
                     <p:ext uri="{3AFAAA56-56D3-431D-BCD4-E75A35582382}">
                       <p173:tracksInfo xmlns:p173="http://schemas.microsoft.com/office/powerpoint/2017/3/main" displayLoc="slide">
                         <p173:trackLst>
-                          <p173:track id="{0CF4CC32-0BB3-413F-B015-4229A1DBBC8D}" label="English (captions)" lang="en-US" r:embed="rId8"/>
+                          <p173:track id="{00FD10B2-3102-401F-BA47-338DFE350FD1}" label="English (captions)" lang="en-US" r:embed="rId8"/>
                         </p173:trackLst>
                       </p173:tracksInfo>
                     </p:ext>
@@ -17656,7 +17656,7 @@
         </p:blipFill>
         <p:spPr>
           <a:xfrm>
-            <a:off x="127000" y="6350000"/>
+            <a:off x="12446000" y="127000"/>
             <a:ext cx="304800" cy="304800"/>
           </a:xfrm>
           <a:prstGeom prst="rect">
@@ -19243,7 +19243,7 @@
             <a:hlinkClick r:id="" action="ppaction://media"/>
             <a:extLst>
               <a:ext uri="{FF2B5EF4-FFF2-40B4-BE49-F238E27FC236}">
-                <a16:creationId xmlns:a16="http://schemas.microsoft.com/office/drawing/2014/main" id="{73762D21-D497-9714-2A6E-DDFECE277800}"/>
+                <a16:creationId xmlns:a16="http://schemas.microsoft.com/office/drawing/2014/main" id="{56ABA9A4-17F9-5DB1-8BC9-1F85068BD076}"/>
               </a:ext>
             </a:extLst>
           </p:cNvPr>
@@ -19259,7 +19259,7 @@
                     <p:ext uri="{3AFAAA56-56D3-431D-BCD4-E75A35582382}">
                       <p173:tracksInfo xmlns:p173="http://schemas.microsoft.com/office/powerpoint/2017/3/main" displayLoc="slide">
                         <p173:trackLst>
-                          <p173:track id="{0AA88F6B-3A86-4CD3-A8E9-A813847E30AF}" label="English (captions)" lang="en-US" r:embed="rId8"/>
+                          <p173:track id="{9EC19ED2-6989-47F7-BF42-8F351171AB88}" label="English (captions)" lang="en-US" r:embed="rId8"/>
                         </p173:trackLst>
                       </p173:tracksInfo>
                     </p:ext>
@@ -19277,7 +19277,7 @@
         </p:blipFill>
         <p:spPr>
           <a:xfrm>
-            <a:off x="127000" y="6350000"/>
+            <a:off x="12446000" y="127000"/>
             <a:ext cx="304800" cy="304800"/>
           </a:xfrm>
           <a:prstGeom prst="rect">
@@ -20840,7 +20840,7 @@
             <a:hlinkClick r:id="" action="ppaction://media"/>
             <a:extLst>
               <a:ext uri="{FF2B5EF4-FFF2-40B4-BE49-F238E27FC236}">
-                <a16:creationId xmlns:a16="http://schemas.microsoft.com/office/drawing/2014/main" id="{136FA02F-A344-A0E1-8084-CFCC1072D77F}"/>
+                <a16:creationId xmlns:a16="http://schemas.microsoft.com/office/drawing/2014/main" id="{C1535E28-C74E-5B5F-4399-20E542BE03B9}"/>
               </a:ext>
             </a:extLst>
           </p:cNvPr>
@@ -20856,7 +20856,7 @@
                     <p:ext uri="{3AFAAA56-56D3-431D-BCD4-E75A35582382}">
                       <p173:tracksInfo xmlns:p173="http://schemas.microsoft.com/office/powerpoint/2017/3/main" displayLoc="slide">
                         <p173:trackLst>
-                          <p173:track id="{9CC8600A-2F73-4016-8CA6-D673B8CF4D30}" label="English (captions)" lang="en-US" r:embed="rId9"/>
+                          <p173:track id="{3BE64473-ACFD-4688-8D79-4149A0BAA77B}" label="English (captions)" lang="en-US" r:embed="rId9"/>
                         </p173:trackLst>
                       </p173:tracksInfo>
                     </p:ext>
@@ -20874,7 +20874,7 @@
         </p:blipFill>
         <p:spPr>
           <a:xfrm>
-            <a:off x="127000" y="6350000"/>
+            <a:off x="12446000" y="127000"/>
             <a:ext cx="304800" cy="304800"/>
           </a:xfrm>
           <a:prstGeom prst="rect">
@@ -22029,7 +22029,7 @@
             <a:hlinkClick r:id="" action="ppaction://media"/>
             <a:extLst>
               <a:ext uri="{FF2B5EF4-FFF2-40B4-BE49-F238E27FC236}">
-                <a16:creationId xmlns:a16="http://schemas.microsoft.com/office/drawing/2014/main" id="{9BAE946D-1C75-5589-B04B-00DB4E10D81C}"/>
+                <a16:creationId xmlns:a16="http://schemas.microsoft.com/office/drawing/2014/main" id="{52C2DC0E-3AB1-0F34-DB00-C9755BD99111}"/>
               </a:ext>
             </a:extLst>
           </p:cNvPr>
@@ -22045,7 +22045,7 @@
                     <p:ext uri="{3AFAAA56-56D3-431D-BCD4-E75A35582382}">
                       <p173:tracksInfo xmlns:p173="http://schemas.microsoft.com/office/powerpoint/2017/3/main" displayLoc="slide">
                         <p173:trackLst>
-                          <p173:track id="{007A8009-DD24-4768-9F31-30F6F2DE13BD}" label="English (captions)" lang="en-US" r:embed="rId10"/>
+                          <p173:track id="{01DCD31A-AC65-477D-AA0B-C9A3D67F1903}" label="English (captions)" lang="en-US" r:embed="rId10"/>
                         </p173:trackLst>
                       </p173:tracksInfo>
                     </p:ext>
@@ -22063,7 +22063,7 @@
         </p:blipFill>
         <p:spPr>
           <a:xfrm>
-            <a:off x="127000" y="6350000"/>
+            <a:off x="12446000" y="127000"/>
             <a:ext cx="304800" cy="304800"/>
           </a:xfrm>
           <a:prstGeom prst="rect">

--- a/presentations/b12-security-operations/B12_Security_Operations_Narrated.pptx
+++ b/presentations/b12-security-operations/B12_Security_Operations_Narrated.pptx
@@ -120,7 +120,7 @@
   <p:extLst>
     <p:ext uri="{521415D9-36F7-43E2-AB2F-B90AF26B5E84}">
       <p14:sectionLst xmlns:p14="http://schemas.microsoft.com/office/powerpoint/2010/main">
-        <p14:section name="Why visibility comes first" id="{AB105267-046F-F987-EDE8-DECBFDA25888}">
+        <p14:section name="Why visibility comes first" id="{AEFF8FAF-EF07-014A-4720-B4F962A419DA}">
           <p14:sldIdLst>
             <p14:sldId id="256"/>
             <p14:sldId id="257"/>
@@ -128,7 +128,7 @@
             <p14:sldId id="259"/>
           </p14:sldIdLst>
         </p14:section>
-        <p14:section name="What reaches the queue" id="{34E600A9-3231-19E6-2700-140678F0D921}">
+        <p14:section name="What reaches the queue" id="{5A3BD3A7-3E04-35D0-DCD5-39A622987DA8}">
           <p14:sldIdLst>
             <p14:sldId id="260"/>
             <p14:sldId id="261"/>
@@ -137,12 +137,12 @@
             <p14:sldId id="264"/>
           </p14:sldIdLst>
         </p14:section>
-        <p14:section name="Who runs it" id="{D68D2277-4D32-DD1C-61E7-E0F497E8ED5F}">
+        <p14:section name="Who runs it" id="{181D0F14-302D-120D-F740-47EBDF981A65}">
           <p14:sldIdLst>
             <p14:sldId id="265"/>
           </p14:sldIdLst>
         </p14:section>
-        <p14:section name="How to run it" id="{FDD59D25-F145-4662-8BAC-C81A6C3EAB6F}">
+        <p14:section name="How to run it" id="{AB20AFFE-541E-E788-1A4A-FABE23B6A523}">
           <p14:sldIdLst>
             <p14:sldId id="266"/>
             <p14:sldId id="267"/>
@@ -150,7 +150,7 @@
             <p14:sldId id="269"/>
           </p14:sldIdLst>
         </p14:section>
-        <p14:section name="Backup" id="{A4E760A3-6EF7-ACCF-470F-A94202C2DC04}">
+        <p14:section name="Backup" id="{F04791AF-3302-F2EF-65BE-947732D77D51}">
           <p14:sldIdLst/>
         </p14:section>
       </p14:sectionLst>
@@ -187,7 +187,7 @@
     </p:spTree>
     <p:extLst>
       <p:ext uri="{BB962C8B-B14F-4D97-AF65-F5344CB8AC3E}">
-        <p14:creationId xmlns:p14="http://schemas.microsoft.com/office/powerpoint/2010/main" val="3253904720"/>
+        <p14:creationId xmlns:p14="http://schemas.microsoft.com/office/powerpoint/2010/main" val="3704708078"/>
       </p:ext>
     </p:extLst>
   </p:cSld>
@@ -423,7 +423,7 @@
           <a:p>
             <a:r>
               <a:rPr lang="en-US" dirty="0"/>
-              <a:t>[9:38–10:46]  Who runs security operations? Most agencies can name their SOC. Fewer can say who decided that a log source is collected, how long it's kept, or who accepted the risk when it went quiet for three weeks.
+              <a:t>[9:47–10:55]  Who runs security operations? Most agencies can name their SOC. Fewer can say who decided that a log source is collected, how long it's kept, or who accepted the risk when it went quiet for three weeks.
 The program assigns them. The CIO sets scope and funding and designates the top-level SOC. The CISO decides what each plane must emit, owns the Agency Logging Plan, and approves any playbook that acts on production. Platform owners keep their own planes emitting. Security engineering builds the SIEM, the rules, the playbooks and the evidence pipeline. The SOC runs the queue, and CISA's one-hour clock starts there.
 Two roles are easy to forget. The records officer decides disposition, and must concur before anyone shortens retention, because evidence that's gone can't come back. And the authorizing official, the only official who can accept risk, accepts the risk of not seeing: a gap carried rather than closed, a suppression with no end date, a missed deadline.
 Workbook: Book 12, Chapter 10 — Who Runs Security Operations (Where the roles come from; The SOC is a common control provider; The roles; Three questions, one owner each; The responsibility matrix).</a:t>
@@ -513,7 +513,7 @@
           <a:p>
             <a:r>
               <a:rPr lang="en-US" dirty="0"/>
-              <a:t>[10:46–11:53]  How do detections get built? As code. The rule library lives in version control, and nobody edits a production rule in the portal; a change is a reviewed commit. Every rule has one named owner, a test and a review date.
+              <a:t>[10:55–12:02]  How do detections get built? As code. The rule library lives in version control, and nobody edits a production rule in the portal; a change is a reviewed commit. Every rule has one named owner, a test and a review date.
 Each rule moves through five steps. Author it, starting from Microsoft's template where one exists. Test it against history and replay a known-bad sample, because a rule that can't be shown to fire isn't finished. Run it alert-only for at least two weeks, and until its false positives are documented. Promote it. Then review it at least quarterly.
 Where a vendor analytic isn't available in the agency's cloud, the program rebuilds an equivalent inside its own boundary, and says it isn't parity.
 Plan for rot. Thresholds drift, sources stop without an error, and Sentinel disables a rule after repeated failures and marks it auto disabled. The standing tuning effort is the real cost of having a library.
@@ -604,7 +604,7 @@
           <a:p>
             <a:r>
               <a:rPr lang="en-US" dirty="0"/>
-              <a:t>[11:53–12:59]  Detection without response shortens the investigation, not the exposure. So every playbook is confidence-gated: high confidence prepares containment, medium confidence enriches and tickets for a human, and low confidence never acts.
+              <a:t>[12:02–13:08]  Detection without response shortens the investigation, not the exposure. So every playbook is confidence-gated: high confidence prepares containment, medium confidence enriches and tickets for a human, and low confidence never acts.
 Responses sit on the workbook's actuation ladder. L1 observes. L2 advises. L3, gated actuation, is the default for anything with a large blast radius: the playbook checks its preconditions and prepares the action, and a named approver releases it. L4 runs alone, logged and reversible, for enumerated classes such as closing known-benign incidents. Three classes stay at L3 permanently: isolating a server, disabling a privileged or emergency account, and any tenant-wide change.
 Defender XDR's attack disruption acts on its own, so the authorizing official decides whether to accept it as L4.
 Latency is real. Session revocation can take up to 15 minutes in services that support continuous access evaluation, and a hybrid user must be disabled in Active Directory too, or the next synchronization undoes it.
@@ -695,7 +695,7 @@
           <a:p>
             <a:r>
               <a:rPr lang="en-US" dirty="0"/>
-              <a:t>[12:59–14:05]  Last, prove it works. Continuous monitoring is a pipeline: emit, normalize, correlate, bind each record to its control, report, and respond.
+              <a:t>[13:08–14:14]  Last, prove it works. Continuous monitoring is a pipeline: emit, normalize, correlate, bind each record to its control, report, and respond.
 The metrics are built so they can't flatter. Detection coverage counts how many of M-26-14's eleven baseline activities have an enabled, tested rule over a fresh source, not how many rules exist. Telemetry completeness treats a stale required source as an AU-5 failure. KEV remediation counts closures within the BOD 26-04 timeline, plus open items past it, because a share of the open queue improves every time new findings arrive. And configuration reports passing, failing and excepted settings separately.
 Read outside scores carefully. M-26-14 scores each system at its lowest element, and a system can reach Advanced while missing the six-month searchable floor. FedRAMP's 46 Key Security Indicators bind cloud providers, not agencies; the agency reviews each provider's quarterly report.
 A finding closes on re-test evidence, or the authorizing official carries it with an end date.
@@ -786,7 +786,7 @@
           <a:p>
             <a:r>
               <a:rPr lang="en-US" dirty="0"/>
-              <a:t>[14:05–15:08]  So, four decisions.
+              <a:t>[14:14–15:16]  So, four decisions.
 Name the planes and assets that are expected to emit, and check each one against what actually arrives.
 Stand up the naming plane before the evidence pipeline, so every record joins on one asset identity.
 Fund the Agency Logging Plan as the program's visibility plan, not as a storage purchase.
@@ -1513,7 +1513,7 @@
           <a:p>
             <a:r>
               <a:rPr lang="en-US" dirty="0"/>
-              <a:t>[8:30–9:38]  Three more streams share the queue. Configuration first: a patched host that drifts from its baseline isn't remediated. Baselines come from SCuBA, CIS or DISA STIGs. Azure machine configuration's auto-correct mode fixes drift without recording it, so the program keeps it for low-risk settings.
+              <a:t>[8:30–9:47]  Three more streams share the queue. Configuration first: a patched host that drifts from its baseline isn't remediated. Baselines come from SCuBA for Microsoft 365 and Google Workspace, and from CIS Benchmarks or the vendor's hardening guide for servers and platforms, written as the agency's CM-6 settings. Azure machine configuration's auto-correct mode fixes drift without recording it, so the program keeps it for low-risk settings.
 Cloud posture next. A storage account open to the internet has no missing patch, so a scanner never reports it. Each provider's native posture tool is primary for its own platform. Defender for Cloud doesn't cover Oracle Cloud, and its AWS connector isn't available in Azure Government.
 Then data. The CUI framework has two levels, Basic and Specified, decided by the authority in the CUI Registry: Privacy Act records are Basic, and federal taxpayer information is Specified. Labels drive data loss prevention on the service, the endpoint and the CASB.
 And check queue membership. Since early October 2026, a built-in Microsoft tuning rule keeps DLP signals out of the incident queue unless an administrator turns it off.
@@ -2525,7 +2525,7 @@
             <a:hlinkClick r:id="" action="ppaction://media"/>
             <a:extLst>
               <a:ext uri="{FF2B5EF4-FFF2-40B4-BE49-F238E27FC236}">
-                <a16:creationId xmlns:a16="http://schemas.microsoft.com/office/drawing/2014/main" id="{7FCEAED6-93B5-D7DE-69DA-5E8F0833F392}"/>
+                <a16:creationId xmlns:a16="http://schemas.microsoft.com/office/drawing/2014/main" id="{DFAA4FD6-A9D2-0415-5FD6-E3B9227B479C}"/>
               </a:ext>
             </a:extLst>
           </p:cNvPr>
@@ -2541,7 +2541,7 @@
                     <p:ext uri="{3AFAAA56-56D3-431D-BCD4-E75A35582382}">
                       <p173:tracksInfo xmlns:p173="http://schemas.microsoft.com/office/powerpoint/2017/3/main" displayLoc="slide">
                         <p173:trackLst>
-                          <p173:track id="{0D12A927-6005-47DA-B400-EC1C7E21E3DF}" label="English (captions)" lang="en-US" r:embed="rId6"/>
+                          <p173:track id="{A61D2255-B0C9-41D3-8826-5D0402EED883}" label="English (captions)" lang="en-US" r:embed="rId6"/>
                         </p173:trackLst>
                       </p173:tracksInfo>
                     </p:ext>
@@ -3947,7 +3947,7 @@
             <a:hlinkClick r:id="" action="ppaction://media"/>
             <a:extLst>
               <a:ext uri="{FF2B5EF4-FFF2-40B4-BE49-F238E27FC236}">
-                <a16:creationId xmlns:a16="http://schemas.microsoft.com/office/drawing/2014/main" id="{95041AF8-6784-A76F-5CDD-595BAA70EF98}"/>
+                <a16:creationId xmlns:a16="http://schemas.microsoft.com/office/drawing/2014/main" id="{A8C17F7C-0D6D-FE8B-C908-C0F2E27FEBED}"/>
               </a:ext>
             </a:extLst>
           </p:cNvPr>
@@ -3963,7 +3963,7 @@
                     <p:ext uri="{3AFAAA56-56D3-431D-BCD4-E75A35582382}">
                       <p173:tracksInfo xmlns:p173="http://schemas.microsoft.com/office/powerpoint/2017/3/main" displayLoc="slide">
                         <p173:trackLst>
-                          <p173:track id="{CED99B52-566D-4053-89FD-B6B85AF41F2D}" label="English (captions)" lang="en-US" r:embed="rId9"/>
+                          <p173:track id="{ECA319D7-E9A6-450A-AB45-F4229DCBFFAF}" label="English (captions)" lang="en-US" r:embed="rId9"/>
                         </p173:trackLst>
                       </p173:tracksInfo>
                     </p:ext>
@@ -5437,7 +5437,7 @@
             <a:hlinkClick r:id="" action="ppaction://media"/>
             <a:extLst>
               <a:ext uri="{FF2B5EF4-FFF2-40B4-BE49-F238E27FC236}">
-                <a16:creationId xmlns:a16="http://schemas.microsoft.com/office/drawing/2014/main" id="{868816A5-F14D-4D27-0330-D10FD6A4147D}"/>
+                <a16:creationId xmlns:a16="http://schemas.microsoft.com/office/drawing/2014/main" id="{C5F055F7-61FD-9075-9366-A22437A29838}"/>
               </a:ext>
             </a:extLst>
           </p:cNvPr>
@@ -5453,7 +5453,7 @@
                     <p:ext uri="{3AFAAA56-56D3-431D-BCD4-E75A35582382}">
                       <p173:tracksInfo xmlns:p173="http://schemas.microsoft.com/office/powerpoint/2017/3/main" displayLoc="slide">
                         <p173:trackLst>
-                          <p173:track id="{A36EDA7F-64F4-476B-ABB0-3C9E2B8E2042}" label="English (captions)" lang="en-US" r:embed="rId9"/>
+                          <p173:track id="{046442DE-98C0-4B37-BFFB-413EE19187E0}" label="English (captions)" lang="en-US" r:embed="rId9"/>
                         </p173:trackLst>
                       </p173:tracksInfo>
                     </p:ext>
@@ -7262,7 +7262,7 @@
             <a:hlinkClick r:id="" action="ppaction://media"/>
             <a:extLst>
               <a:ext uri="{FF2B5EF4-FFF2-40B4-BE49-F238E27FC236}">
-                <a16:creationId xmlns:a16="http://schemas.microsoft.com/office/drawing/2014/main" id="{1BDFC679-DB3D-1BAA-20A5-9CEA65970CC6}"/>
+                <a16:creationId xmlns:a16="http://schemas.microsoft.com/office/drawing/2014/main" id="{119595DE-0106-095F-D3AA-A388C219F15C}"/>
               </a:ext>
             </a:extLst>
           </p:cNvPr>
@@ -7278,7 +7278,7 @@
                     <p:ext uri="{3AFAAA56-56D3-431D-BCD4-E75A35582382}">
                       <p173:tracksInfo xmlns:p173="http://schemas.microsoft.com/office/powerpoint/2017/3/main" displayLoc="slide">
                         <p173:trackLst>
-                          <p173:track id="{BCA99571-6F21-4EFA-9652-1439A77AB956}" label="English (captions)" lang="en-US" r:embed="rId8"/>
+                          <p173:track id="{8DD51B28-EEC4-47CA-92AE-08B3C26E5E55}" label="English (captions)" lang="en-US" r:embed="rId8"/>
                         </p173:trackLst>
                       </p173:tracksInfo>
                     </p:ext>
@@ -8859,7 +8859,7 @@
             <a:hlinkClick r:id="" action="ppaction://media"/>
             <a:extLst>
               <a:ext uri="{FF2B5EF4-FFF2-40B4-BE49-F238E27FC236}">
-                <a16:creationId xmlns:a16="http://schemas.microsoft.com/office/drawing/2014/main" id="{17BA0ACA-15D6-26E3-481E-82AB0880F573}"/>
+                <a16:creationId xmlns:a16="http://schemas.microsoft.com/office/drawing/2014/main" id="{12E23F3C-DCC1-F896-E62E-AA40A11DFDE8}"/>
               </a:ext>
             </a:extLst>
           </p:cNvPr>
@@ -8875,7 +8875,7 @@
                     <p:ext uri="{3AFAAA56-56D3-431D-BCD4-E75A35582382}">
                       <p173:tracksInfo xmlns:p173="http://schemas.microsoft.com/office/powerpoint/2017/3/main" displayLoc="slide">
                         <p173:trackLst>
-                          <p173:track id="{FC4BCC64-52BC-4954-AEBD-B08151C6A172}" label="English (captions)" lang="en-US" r:embed="rId9"/>
+                          <p173:track id="{6105BFD5-7E1E-4941-B16A-130DD0308C8B}" label="English (captions)" lang="en-US" r:embed="rId9"/>
                         </p173:trackLst>
                       </p173:tracksInfo>
                     </p:ext>
@@ -9962,7 +9962,7 @@
             <a:hlinkClick r:id="" action="ppaction://media"/>
             <a:extLst>
               <a:ext uri="{FF2B5EF4-FFF2-40B4-BE49-F238E27FC236}">
-                <a16:creationId xmlns:a16="http://schemas.microsoft.com/office/drawing/2014/main" id="{6A7B492C-858D-70A7-911C-DF7701D07001}"/>
+                <a16:creationId xmlns:a16="http://schemas.microsoft.com/office/drawing/2014/main" id="{BEBAF255-7F22-100E-F265-A7174BB62634}"/>
               </a:ext>
             </a:extLst>
           </p:cNvPr>
@@ -9978,7 +9978,7 @@
                     <p:ext uri="{3AFAAA56-56D3-431D-BCD4-E75A35582382}">
                       <p173:tracksInfo xmlns:p173="http://schemas.microsoft.com/office/powerpoint/2017/3/main" displayLoc="slide">
                         <p173:trackLst>
-                          <p173:track id="{7410C4E6-7856-496B-B1B1-E55CD9CA49BA}" label="English (captions)" lang="en-US" r:embed="rId11"/>
+                          <p173:track id="{DC294E25-A376-4AB4-BEA7-F7C50F8D1D59}" label="English (captions)" lang="en-US" r:embed="rId11"/>
                         </p173:trackLst>
                       </p173:tracksInfo>
                     </p:ext>
@@ -11069,7 +11069,7 @@
             <a:hlinkClick r:id="" action="ppaction://media"/>
             <a:extLst>
               <a:ext uri="{FF2B5EF4-FFF2-40B4-BE49-F238E27FC236}">
-                <a16:creationId xmlns:a16="http://schemas.microsoft.com/office/drawing/2014/main" id="{E2FF1382-8E76-B83C-9B7A-B33E94CC22A1}"/>
+                <a16:creationId xmlns:a16="http://schemas.microsoft.com/office/drawing/2014/main" id="{A0AF868B-2426-E87B-53E4-F4D4E8882B00}"/>
               </a:ext>
             </a:extLst>
           </p:cNvPr>
@@ -11085,7 +11085,7 @@
                     <p:ext uri="{3AFAAA56-56D3-431D-BCD4-E75A35582382}">
                       <p173:tracksInfo xmlns:p173="http://schemas.microsoft.com/office/powerpoint/2017/3/main" displayLoc="slide">
                         <p173:trackLst>
-                          <p173:track id="{5CF9901F-6270-4527-B3C7-38B3572D7423}" label="English (captions)" lang="en-US" r:embed="rId8"/>
+                          <p173:track id="{71C50FB7-7677-44CA-99E1-035B8CD0A4D6}" label="English (captions)" lang="en-US" r:embed="rId8"/>
                         </p173:trackLst>
                       </p173:tracksInfo>
                     </p:ext>
@@ -12452,7 +12452,7 @@
             <a:hlinkClick r:id="" action="ppaction://media"/>
             <a:extLst>
               <a:ext uri="{FF2B5EF4-FFF2-40B4-BE49-F238E27FC236}">
-                <a16:creationId xmlns:a16="http://schemas.microsoft.com/office/drawing/2014/main" id="{1ACB2A9D-CCC8-B6B1-358A-D4769604DDD9}"/>
+                <a16:creationId xmlns:a16="http://schemas.microsoft.com/office/drawing/2014/main" id="{C40ACA1F-A191-B225-75A3-175A11611C7F}"/>
               </a:ext>
             </a:extLst>
           </p:cNvPr>
@@ -12468,7 +12468,7 @@
                     <p:ext uri="{3AFAAA56-56D3-431D-BCD4-E75A35582382}">
                       <p173:tracksInfo xmlns:p173="http://schemas.microsoft.com/office/powerpoint/2017/3/main" displayLoc="slide">
                         <p173:trackLst>
-                          <p173:track id="{AA609E15-994A-4FFA-B1BD-BA72400E7B82}" label="English (captions)" lang="en-US" r:embed="rId9"/>
+                          <p173:track id="{BF5DDF96-78C3-4A74-B54C-22F3E6CE072D}" label="English (captions)" lang="en-US" r:embed="rId9"/>
                         </p173:trackLst>
                       </p173:tracksInfo>
                     </p:ext>
@@ -14502,7 +14502,7 @@
             <a:hlinkClick r:id="" action="ppaction://media"/>
             <a:extLst>
               <a:ext uri="{FF2B5EF4-FFF2-40B4-BE49-F238E27FC236}">
-                <a16:creationId xmlns:a16="http://schemas.microsoft.com/office/drawing/2014/main" id="{92ABAC0F-8946-6695-11EB-EA5017DF0FBF}"/>
+                <a16:creationId xmlns:a16="http://schemas.microsoft.com/office/drawing/2014/main" id="{9E08A70F-7D98-FAE1-19DE-CB3D6BECAF4F}"/>
               </a:ext>
             </a:extLst>
           </p:cNvPr>
@@ -14518,7 +14518,7 @@
                     <p:ext uri="{3AFAAA56-56D3-431D-BCD4-E75A35582382}">
                       <p173:tracksInfo xmlns:p173="http://schemas.microsoft.com/office/powerpoint/2017/3/main" displayLoc="slide">
                         <p173:trackLst>
-                          <p173:track id="{6BCBF812-AC4B-48CE-85C2-6D50CB2EF204}" label="English (captions)" lang="en-US" r:embed="rId8"/>
+                          <p173:track id="{43A21ED5-3C73-49E0-8349-C7F48C7B4487}" label="English (captions)" lang="en-US" r:embed="rId8"/>
                         </p173:trackLst>
                       </p173:tracksInfo>
                     </p:ext>
@@ -16515,7 +16515,7 @@
             <a:hlinkClick r:id="" action="ppaction://media"/>
             <a:extLst>
               <a:ext uri="{FF2B5EF4-FFF2-40B4-BE49-F238E27FC236}">
-                <a16:creationId xmlns:a16="http://schemas.microsoft.com/office/drawing/2014/main" id="{4C811A37-65A0-09DD-25A9-7B6BFDB2141A}"/>
+                <a16:creationId xmlns:a16="http://schemas.microsoft.com/office/drawing/2014/main" id="{11196625-DF54-5371-BC6A-F0B4AB1C0E60}"/>
               </a:ext>
             </a:extLst>
           </p:cNvPr>
@@ -16531,7 +16531,7 @@
                     <p:ext uri="{3AFAAA56-56D3-431D-BCD4-E75A35582382}">
                       <p173:tracksInfo xmlns:p173="http://schemas.microsoft.com/office/powerpoint/2017/3/main" displayLoc="slide">
                         <p173:trackLst>
-                          <p173:track id="{AA0D9A1A-8E9D-4714-8B70-BDD543B004FB}" label="English (captions)" lang="en-US" r:embed="rId7"/>
+                          <p173:track id="{4802AB79-2703-4929-83B1-1F0CC50C13DD}" label="English (captions)" lang="en-US" r:embed="rId7"/>
                         </p173:trackLst>
                       </p173:tracksInfo>
                     </p:ext>
@@ -17622,7 +17622,7 @@
             <a:hlinkClick r:id="" action="ppaction://media"/>
             <a:extLst>
               <a:ext uri="{FF2B5EF4-FFF2-40B4-BE49-F238E27FC236}">
-                <a16:creationId xmlns:a16="http://schemas.microsoft.com/office/drawing/2014/main" id="{4C452772-1F39-310C-A55F-F91496C2B616}"/>
+                <a16:creationId xmlns:a16="http://schemas.microsoft.com/office/drawing/2014/main" id="{9B0A6FB4-D0A7-AEAA-DF7C-044D531A57CB}"/>
               </a:ext>
             </a:extLst>
           </p:cNvPr>
@@ -17638,7 +17638,7 @@
                     <p:ext uri="{3AFAAA56-56D3-431D-BCD4-E75A35582382}">
                       <p173:tracksInfo xmlns:p173="http://schemas.microsoft.com/office/powerpoint/2017/3/main" displayLoc="slide">
                         <p173:trackLst>
-                          <p173:track id="{00FD10B2-3102-401F-BA47-338DFE350FD1}" label="English (captions)" lang="en-US" r:embed="rId8"/>
+                          <p173:track id="{261B434A-0A84-488C-9F55-4BC2D7FD5213}" label="English (captions)" lang="en-US" r:embed="rId8"/>
                         </p173:trackLst>
                       </p173:tracksInfo>
                     </p:ext>
@@ -19243,7 +19243,7 @@
             <a:hlinkClick r:id="" action="ppaction://media"/>
             <a:extLst>
               <a:ext uri="{FF2B5EF4-FFF2-40B4-BE49-F238E27FC236}">
-                <a16:creationId xmlns:a16="http://schemas.microsoft.com/office/drawing/2014/main" id="{56ABA9A4-17F9-5DB1-8BC9-1F85068BD076}"/>
+                <a16:creationId xmlns:a16="http://schemas.microsoft.com/office/drawing/2014/main" id="{463ABF31-EDA6-C4CF-0B39-8A51DEAFD48E}"/>
               </a:ext>
             </a:extLst>
           </p:cNvPr>
@@ -19259,7 +19259,7 @@
                     <p:ext uri="{3AFAAA56-56D3-431D-BCD4-E75A35582382}">
                       <p173:tracksInfo xmlns:p173="http://schemas.microsoft.com/office/powerpoint/2017/3/main" displayLoc="slide">
                         <p173:trackLst>
-                          <p173:track id="{9EC19ED2-6989-47F7-BF42-8F351171AB88}" label="English (captions)" lang="en-US" r:embed="rId8"/>
+                          <p173:track id="{E04FF5BC-C430-483F-A747-0CE858EAF308}" label="English (captions)" lang="en-US" r:embed="rId8"/>
                         </p173:trackLst>
                       </p173:tracksInfo>
                     </p:ext>
@@ -20840,7 +20840,7 @@
             <a:hlinkClick r:id="" action="ppaction://media"/>
             <a:extLst>
               <a:ext uri="{FF2B5EF4-FFF2-40B4-BE49-F238E27FC236}">
-                <a16:creationId xmlns:a16="http://schemas.microsoft.com/office/drawing/2014/main" id="{C1535E28-C74E-5B5F-4399-20E542BE03B9}"/>
+                <a16:creationId xmlns:a16="http://schemas.microsoft.com/office/drawing/2014/main" id="{C4163C0F-8DE9-1D9B-9493-C1BDEF43B436}"/>
               </a:ext>
             </a:extLst>
           </p:cNvPr>
@@ -20856,7 +20856,7 @@
                     <p:ext uri="{3AFAAA56-56D3-431D-BCD4-E75A35582382}">
                       <p173:tracksInfo xmlns:p173="http://schemas.microsoft.com/office/powerpoint/2017/3/main" displayLoc="slide">
                         <p173:trackLst>
-                          <p173:track id="{3BE64473-ACFD-4688-8D79-4149A0BAA77B}" label="English (captions)" lang="en-US" r:embed="rId9"/>
+                          <p173:track id="{C8E2629E-93A8-44C4-85AD-EACB79DDB7AB}" label="English (captions)" lang="en-US" r:embed="rId9"/>
                         </p173:trackLst>
                       </p173:tracksInfo>
                     </p:ext>
@@ -21269,7 +21269,7 @@
                   <a:schemeClr val="tx2"/>
                 </a:solidFill>
               </a:rPr>
-              <a:t>CM-6 baselines: SCuBA, CIS, DISA STIG</a:t>
+              <a:t>CM-6 baselines: SCuBA, CIS, vendor guides</a:t>
             </a:r>
             <a:endParaRPr lang="en-US" sz="1400" dirty="0"/>
           </a:p>
@@ -22029,7 +22029,7 @@
             <a:hlinkClick r:id="" action="ppaction://media"/>
             <a:extLst>
               <a:ext uri="{FF2B5EF4-FFF2-40B4-BE49-F238E27FC236}">
-                <a16:creationId xmlns:a16="http://schemas.microsoft.com/office/drawing/2014/main" id="{52C2DC0E-3AB1-0F34-DB00-C9755BD99111}"/>
+                <a16:creationId xmlns:a16="http://schemas.microsoft.com/office/drawing/2014/main" id="{9AC21C68-2832-1AC2-FD00-33CB3DB6492A}"/>
               </a:ext>
             </a:extLst>
           </p:cNvPr>
@@ -22045,7 +22045,7 @@
                     <p:ext uri="{3AFAAA56-56D3-431D-BCD4-E75A35582382}">
                       <p173:tracksInfo xmlns:p173="http://schemas.microsoft.com/office/powerpoint/2017/3/main" displayLoc="slide">
                         <p173:trackLst>
-                          <p173:track id="{01DCD31A-AC65-477D-AA0B-C9A3D67F1903}" label="English (captions)" lang="en-US" r:embed="rId10"/>
+                          <p173:track id="{47424C5A-F4C1-458C-85BC-C672DB753926}" label="English (captions)" lang="en-US" r:embed="rId10"/>
                         </p173:trackLst>
                       </p173:tracksInfo>
                     </p:ext>
